--- a/Chairs-Slides/IETF126-opsarea-chairs-slides.pptx
+++ b/Chairs-Slides/IETF126-opsarea-chairs-slides.pptx
@@ -18,14 +18,14 @@
   <p:notesSz cx="6858000" cy="9144000"/>
   <p:embeddedFontLst>
     <p:embeddedFont>
-      <p:font typeface="Inter" panose="02000503000000020004" pitchFamily="2" charset="0"/>
+      <p:font typeface="Inter" panose="020B0604020202020204" charset="0"/>
       <p:regular r:id="rId8"/>
       <p:bold r:id="rId9"/>
       <p:italic r:id="rId10"/>
       <p:boldItalic r:id="rId11"/>
     </p:embeddedFont>
     <p:embeddedFont>
-      <p:font typeface="Montserrat" pitchFamily="2" charset="77"/>
+      <p:font typeface="Montserrat" panose="00000500000000000000" pitchFamily="2" charset="0"/>
       <p:regular r:id="rId12"/>
       <p:bold r:id="rId13"/>
       <p:italic r:id="rId14"/>
@@ -39,7 +39,7 @@
       <p:boldItalic r:id="rId19"/>
     </p:embeddedFont>
     <p:embeddedFont>
-      <p:font typeface="Open Sans Medium" pitchFamily="2" charset="0"/>
+      <p:font typeface="Open Sans Medium" panose="020B0604020202020204" charset="0"/>
       <p:regular r:id="rId20"/>
       <p:bold r:id="rId21"/>
       <p:italic r:id="rId22"/>
@@ -314,148 +314,6 @@
     <p1510:client id="{2EFB6760-0EB4-4B41-9C52-91BBD0FFA6C9}" v="4" dt="2026-03-07T09:28:16.347"/>
   </p1510:revLst>
 </p1510:revInfo>
-</file>
-
-<file path=ppt/changesInfos/changesInfo1.xml><?xml version="1.0" encoding="utf-8"?>
-<pc:chgInfo xmlns:a="http://schemas.openxmlformats.org/drawingml/2006/main" xmlns:r="http://schemas.openxmlformats.org/officeDocument/2006/relationships" xmlns:ac="http://schemas.microsoft.com/office/drawing/2013/main/command" xmlns:pc="http://schemas.microsoft.com/office/powerpoint/2013/main/command">
-  <pc:docChgLst>
-    <pc:chgData name="BOUCADAIR Mohamed INNOV/NET" userId="2acbca90-6db1-4111-98c4-832797dda751" providerId="ADAL" clId="{4F93B282-C25B-41D9-9F46-D8A159C0F759}"/>
-    <pc:docChg chg="custSel addSld modSld">
-      <pc:chgData name="BOUCADAIR Mohamed INNOV/NET" userId="2acbca90-6db1-4111-98c4-832797dda751" providerId="ADAL" clId="{4F93B282-C25B-41D9-9F46-D8A159C0F759}" dt="2025-11-06T17:13:42.915" v="209" actId="1076"/>
-      <pc:docMkLst>
-        <pc:docMk/>
-      </pc:docMkLst>
-      <pc:sldChg chg="addSp delSp modSp mod">
-        <pc:chgData name="BOUCADAIR Mohamed INNOV/NET" userId="2acbca90-6db1-4111-98c4-832797dda751" providerId="ADAL" clId="{4F93B282-C25B-41D9-9F46-D8A159C0F759}" dt="2025-11-06T17:13:42.915" v="209" actId="1076"/>
-        <pc:sldMkLst>
-          <pc:docMk/>
-          <pc:sldMk cId="4281018982" sldId="260"/>
-        </pc:sldMkLst>
-      </pc:sldChg>
-      <pc:sldChg chg="modSp mod">
-        <pc:chgData name="BOUCADAIR Mohamed INNOV/NET" userId="2acbca90-6db1-4111-98c4-832797dda751" providerId="ADAL" clId="{4F93B282-C25B-41D9-9F46-D8A159C0F759}" dt="2025-10-30T11:36:47.682" v="58" actId="20577"/>
-        <pc:sldMkLst>
-          <pc:docMk/>
-          <pc:sldMk cId="0" sldId="276"/>
-        </pc:sldMkLst>
-      </pc:sldChg>
-      <pc:sldChg chg="addSp delSp modSp new mod">
-        <pc:chgData name="BOUCADAIR Mohamed INNOV/NET" userId="2acbca90-6db1-4111-98c4-832797dda751" providerId="ADAL" clId="{4F93B282-C25B-41D9-9F46-D8A159C0F759}" dt="2025-11-06T13:03:29.978" v="204" actId="20577"/>
-        <pc:sldMkLst>
-          <pc:docMk/>
-          <pc:sldMk cId="1532505644" sldId="277"/>
-        </pc:sldMkLst>
-      </pc:sldChg>
-    </pc:docChg>
-  </pc:docChgLst>
-  <pc:docChgLst>
-    <pc:chgData name="BOUCADAIR Mohamed INNOV/NET" userId="2acbca90-6db1-4111-98c4-832797dda751" providerId="ADAL" clId="{A64BD271-A47C-4266-84F7-4325E25623CE}"/>
-    <pc:docChg chg="undo custSel mod modSld modMainMaster">
-      <pc:chgData name="BOUCADAIR Mohamed INNOV/NET" userId="2acbca90-6db1-4111-98c4-832797dda751" providerId="ADAL" clId="{A64BD271-A47C-4266-84F7-4325E25623CE}" dt="2026-03-09T10:12:41.939" v="1040" actId="1076"/>
-      <pc:docMkLst>
-        <pc:docMk/>
-      </pc:docMkLst>
-      <pc:sldChg chg="modSp mod">
-        <pc:chgData name="BOUCADAIR Mohamed INNOV/NET" userId="2acbca90-6db1-4111-98c4-832797dda751" providerId="ADAL" clId="{A64BD271-A47C-4266-84F7-4325E25623CE}" dt="2026-03-07T09:25:07.366" v="0" actId="20577"/>
-        <pc:sldMkLst>
-          <pc:docMk/>
-          <pc:sldMk cId="0" sldId="258"/>
-        </pc:sldMkLst>
-        <pc:spChg chg="mod">
-          <ac:chgData name="BOUCADAIR Mohamed INNOV/NET" userId="2acbca90-6db1-4111-98c4-832797dda751" providerId="ADAL" clId="{A64BD271-A47C-4266-84F7-4325E25623CE}" dt="2026-03-07T09:25:07.366" v="0" actId="20577"/>
-          <ac:spMkLst>
-            <pc:docMk/>
-            <pc:sldMk cId="0" sldId="258"/>
-            <ac:spMk id="114" creationId="{00000000-0000-0000-0000-000000000000}"/>
-          </ac:spMkLst>
-        </pc:spChg>
-      </pc:sldChg>
-      <pc:sldChg chg="addSp delSp modSp mod">
-        <pc:chgData name="BOUCADAIR Mohamed INNOV/NET" userId="2acbca90-6db1-4111-98c4-832797dda751" providerId="ADAL" clId="{A64BD271-A47C-4266-84F7-4325E25623CE}" dt="2026-03-09T10:12:41.939" v="1040" actId="1076"/>
-        <pc:sldMkLst>
-          <pc:docMk/>
-          <pc:sldMk cId="4281018982" sldId="260"/>
-        </pc:sldMkLst>
-        <pc:picChg chg="add mod">
-          <ac:chgData name="BOUCADAIR Mohamed INNOV/NET" userId="2acbca90-6db1-4111-98c4-832797dda751" providerId="ADAL" clId="{A64BD271-A47C-4266-84F7-4325E25623CE}" dt="2026-03-09T10:12:41.939" v="1040" actId="1076"/>
-          <ac:picMkLst>
-            <pc:docMk/>
-            <pc:sldMk cId="4281018982" sldId="260"/>
-            <ac:picMk id="5" creationId="{90A88ECC-0E4D-675D-4C74-1501730365CC}"/>
-          </ac:picMkLst>
-        </pc:picChg>
-        <pc:picChg chg="add del mod">
-          <ac:chgData name="BOUCADAIR Mohamed INNOV/NET" userId="2acbca90-6db1-4111-98c4-832797dda751" providerId="ADAL" clId="{A64BD271-A47C-4266-84F7-4325E25623CE}" dt="2026-03-09T10:12:36.343" v="1038" actId="478"/>
-          <ac:picMkLst>
-            <pc:docMk/>
-            <pc:sldMk cId="4281018982" sldId="260"/>
-            <ac:picMk id="6" creationId="{74AC3695-B9BE-6FC5-5342-9F0B450A0B86}"/>
-          </ac:picMkLst>
-        </pc:picChg>
-      </pc:sldChg>
-      <pc:sldChg chg="modSp mod">
-        <pc:chgData name="BOUCADAIR Mohamed INNOV/NET" userId="2acbca90-6db1-4111-98c4-832797dda751" providerId="ADAL" clId="{A64BD271-A47C-4266-84F7-4325E25623CE}" dt="2026-03-09T10:12:33.049" v="1037" actId="20577"/>
-        <pc:sldMkLst>
-          <pc:docMk/>
-          <pc:sldMk cId="0" sldId="276"/>
-        </pc:sldMkLst>
-        <pc:spChg chg="mod">
-          <ac:chgData name="BOUCADAIR Mohamed INNOV/NET" userId="2acbca90-6db1-4111-98c4-832797dda751" providerId="ADAL" clId="{A64BD271-A47C-4266-84F7-4325E25623CE}" dt="2026-03-09T10:12:33.049" v="1037" actId="20577"/>
-          <ac:spMkLst>
-            <pc:docMk/>
-            <pc:sldMk cId="0" sldId="276"/>
-            <ac:spMk id="100" creationId="{00000000-0000-0000-0000-000000000000}"/>
-          </ac:spMkLst>
-        </pc:spChg>
-        <pc:spChg chg="mod">
-          <ac:chgData name="BOUCADAIR Mohamed INNOV/NET" userId="2acbca90-6db1-4111-98c4-832797dda751" providerId="ADAL" clId="{A64BD271-A47C-4266-84F7-4325E25623CE}" dt="2026-03-07T09:26:08.375" v="50" actId="20577"/>
-          <ac:spMkLst>
-            <pc:docMk/>
-            <pc:sldMk cId="0" sldId="276"/>
-            <ac:spMk id="101" creationId="{00000000-0000-0000-0000-000000000000}"/>
-          </ac:spMkLst>
-        </pc:spChg>
-      </pc:sldChg>
-      <pc:sldChg chg="addSp delSp modSp mod">
-        <pc:chgData name="BOUCADAIR Mohamed INNOV/NET" userId="2acbca90-6db1-4111-98c4-832797dda751" providerId="ADAL" clId="{A64BD271-A47C-4266-84F7-4325E25623CE}" dt="2026-03-07T09:45:56.682" v="1031" actId="207"/>
-        <pc:sldMkLst>
-          <pc:docMk/>
-          <pc:sldMk cId="1532505644" sldId="277"/>
-        </pc:sldMkLst>
-        <pc:spChg chg="mod">
-          <ac:chgData name="BOUCADAIR Mohamed INNOV/NET" userId="2acbca90-6db1-4111-98c4-832797dda751" providerId="ADAL" clId="{A64BD271-A47C-4266-84F7-4325E25623CE}" dt="2026-03-07T09:30:48.663" v="115" actId="6549"/>
-          <ac:spMkLst>
-            <pc:docMk/>
-            <pc:sldMk cId="1532505644" sldId="277"/>
-            <ac:spMk id="3" creationId="{3BAEFAD2-3AAD-4D2C-3868-890758D139B0}"/>
-          </ac:spMkLst>
-        </pc:spChg>
-        <pc:spChg chg="add mod">
-          <ac:chgData name="BOUCADAIR Mohamed INNOV/NET" userId="2acbca90-6db1-4111-98c4-832797dda751" providerId="ADAL" clId="{A64BD271-A47C-4266-84F7-4325E25623CE}" dt="2026-03-07T09:45:56.682" v="1031" actId="207"/>
-          <ac:spMkLst>
-            <pc:docMk/>
-            <pc:sldMk cId="1532505644" sldId="277"/>
-            <ac:spMk id="7" creationId="{9B6AEBD5-33A4-7502-01F0-A87041B157FB}"/>
-          </ac:spMkLst>
-        </pc:spChg>
-      </pc:sldChg>
-      <pc:sldMasterChg chg="delSp mod">
-        <pc:chgData name="BOUCADAIR Mohamed INNOV/NET" userId="2acbca90-6db1-4111-98c4-832797dda751" providerId="ADAL" clId="{A64BD271-A47C-4266-84F7-4325E25623CE}" dt="2026-03-07T09:47:44.233" v="1033" actId="33475"/>
-        <pc:sldMasterMkLst>
-          <pc:docMk/>
-          <pc:sldMasterMk cId="0" sldId="2147483664"/>
-        </pc:sldMasterMkLst>
-      </pc:sldMasterChg>
-      <pc:sldMasterChg chg="delSp mod">
-        <pc:chgData name="BOUCADAIR Mohamed INNOV/NET" userId="2acbca90-6db1-4111-98c4-832797dda751" providerId="ADAL" clId="{A64BD271-A47C-4266-84F7-4325E25623CE}" dt="2026-03-07T09:47:44.233" v="1033" actId="33475"/>
-        <pc:sldMasterMkLst>
-          <pc:docMk/>
-          <pc:sldMasterMk cId="0" sldId="2147483665"/>
-        </pc:sldMasterMkLst>
-      </pc:sldMasterChg>
-    </pc:docChg>
-  </pc:docChgLst>
-</pc:chgInfo>
 </file>
 
 <file path=ppt/notesMasters/notesMaster1.xml><?xml version="1.0" encoding="utf-8"?>
@@ -2377,7 +2235,7 @@
             </a:pPr>
             <a:fld id="{00000000-1234-1234-1234-123412341234}" type="slidenum">
               <a:rPr lang="en-US"/>
-              <a:t>‹#›</a:t>
+              <a:t>‹N°›</a:t>
             </a:fld>
             <a:endParaRPr/>
           </a:p>
@@ -3034,7 +2892,7 @@
             </a:pPr>
             <a:fld id="{00000000-1234-1234-1234-123412341234}" type="slidenum">
               <a:rPr lang="en-US"/>
-              <a:t>‹#›</a:t>
+              <a:t>‹N°›</a:t>
             </a:fld>
             <a:endParaRPr/>
           </a:p>
@@ -4270,7 +4128,7 @@
             </a:pPr>
             <a:fld id="{00000000-1234-1234-1234-123412341234}" type="slidenum">
               <a:rPr lang="en-US"/>
-              <a:t>‹#›</a:t>
+              <a:t>‹N°›</a:t>
             </a:fld>
             <a:endParaRPr/>
           </a:p>
@@ -5265,7 +5123,7 @@
             </a:pPr>
             <a:fld id="{00000000-1234-1234-1234-123412341234}" type="slidenum">
               <a:rPr lang="en-US"/>
-              <a:t>‹#›</a:t>
+              <a:t>‹N°›</a:t>
             </a:fld>
             <a:endParaRPr/>
           </a:p>
@@ -5839,7 +5697,7 @@
             </a:pPr>
             <a:fld id="{00000000-1234-1234-1234-123412341234}" type="slidenum">
               <a:rPr lang="en-US"/>
-              <a:t>‹#›</a:t>
+              <a:t>‹N°›</a:t>
             </a:fld>
             <a:endParaRPr/>
           </a:p>
@@ -7075,7 +6933,7 @@
             </a:pPr>
             <a:fld id="{00000000-1234-1234-1234-123412341234}" type="slidenum">
               <a:rPr lang="en-US"/>
-              <a:t>‹#›</a:t>
+              <a:t>‹N°›</a:t>
             </a:fld>
             <a:endParaRPr/>
           </a:p>
@@ -7567,7 +7425,7 @@
             </a:pPr>
             <a:fld id="{00000000-1234-1234-1234-123412341234}" type="slidenum">
               <a:rPr lang="en-US"/>
-              <a:t>‹#›</a:t>
+              <a:t>‹N°›</a:t>
             </a:fld>
             <a:endParaRPr/>
           </a:p>
@@ -8419,7 +8277,7 @@
             </a:pPr>
             <a:fld id="{00000000-1234-1234-1234-123412341234}" type="slidenum">
               <a:rPr lang="en-US"/>
-              <a:t>‹#›</a:t>
+              <a:t>‹N°›</a:t>
             </a:fld>
             <a:endParaRPr/>
           </a:p>
@@ -9395,7 +9253,7 @@
             </a:pPr>
             <a:fld id="{00000000-1234-1234-1234-123412341234}" type="slidenum">
               <a:rPr lang="en-US"/>
-              <a:t>‹#›</a:t>
+              <a:t>‹N°›</a:t>
             </a:fld>
             <a:endParaRPr/>
           </a:p>
@@ -9689,7 +9547,7 @@
             </a:pPr>
             <a:fld id="{00000000-1234-1234-1234-123412341234}" type="slidenum">
               <a:rPr lang="en-US"/>
-              <a:t>‹#›</a:t>
+              <a:t>‹N°›</a:t>
             </a:fld>
             <a:endParaRPr/>
           </a:p>
@@ -10897,7 +10755,7 @@
             </a:pPr>
             <a:fld id="{00000000-1234-1234-1234-123412341234}" type="slidenum">
               <a:rPr lang="en-US"/>
-              <a:t>‹#›</a:t>
+              <a:t>‹N°›</a:t>
             </a:fld>
             <a:endParaRPr/>
           </a:p>
@@ -11803,7 +11661,7 @@
             </a:pPr>
             <a:fld id="{00000000-1234-1234-1234-123412341234}" type="slidenum">
               <a:rPr lang="en-US"/>
-              <a:t>‹#›</a:t>
+              <a:t>‹N°›</a:t>
             </a:fld>
             <a:endParaRPr/>
           </a:p>
@@ -12528,7 +12386,7 @@
             </a:pPr>
             <a:fld id="{00000000-1234-1234-1234-123412341234}" type="slidenum">
               <a:rPr lang="en-US"/>
-              <a:t>‹#›</a:t>
+              <a:t>‹N°›</a:t>
             </a:fld>
             <a:endParaRPr/>
           </a:p>
@@ -13397,7 +13255,7 @@
             </a:pPr>
             <a:fld id="{00000000-1234-1234-1234-123412341234}" type="slidenum">
               <a:rPr lang="en-US"/>
-              <a:t>‹#›</a:t>
+              <a:t>‹N°›</a:t>
             </a:fld>
             <a:endParaRPr/>
           </a:p>
@@ -14514,7 +14372,7 @@
             </a:pPr>
             <a:fld id="{00000000-1234-1234-1234-123412341234}" type="slidenum">
               <a:rPr lang="en-US"/>
-              <a:t>‹#›</a:t>
+              <a:t>‹N°›</a:t>
             </a:fld>
             <a:endParaRPr/>
           </a:p>
@@ -14855,7 +14713,7 @@
             </a:pPr>
             <a:fld id="{00000000-1234-1234-1234-123412341234}" type="slidenum">
               <a:rPr lang="en-US"/>
-              <a:t>‹#›</a:t>
+              <a:t>‹N°›</a:t>
             </a:fld>
             <a:endParaRPr/>
           </a:p>
@@ -16937,7 +16795,7 @@
             </a:pPr>
             <a:fld id="{00000000-1234-1234-1234-123412341234}" type="slidenum">
               <a:rPr lang="en-US"/>
-              <a:t>‹#›</a:t>
+              <a:t>‹N°›</a:t>
             </a:fld>
             <a:endParaRPr/>
           </a:p>
@@ -18058,7 +17916,7 @@
                 <a:cs typeface="Inter"/>
                 <a:sym typeface="Inter"/>
               </a:rPr>
-              <a:t>Minutes: T. Graf</a:t>
+              <a:t>Minutes: T. Graf &amp; Q. Ma</a:t>
             </a:r>
             <a:endParaRPr sz="1100" dirty="0">
               <a:latin typeface="Inter"/>
@@ -18750,7 +18608,7 @@
         <p:fade/>
       </p:transition>
     </mc:Choice>
-    <mc:Fallback xmlns:ahyp="http://schemas.microsoft.com/office/drawing/2018/hyperlinkcolor" xmlns:p15="http://schemas.microsoft.com/office/powerpoint/2012/main" xmlns:com="http://schemas.openxmlformats.org/drawingml/2006/compatibility" xmlns:pvml="urn:schemas-microsoft-com:office:powerpoint" xmlns:v="urn:schemas-microsoft-com:vml" xmlns:o="urn:schemas-microsoft-com:office:office" xmlns:dgm="http://schemas.openxmlformats.org/drawingml/2006/diagram" xmlns:c="http://schemas.openxmlformats.org/drawingml/2006/chart" xmlns:mv="urn:schemas-microsoft-com:mac:vml" xmlns="">
+    <mc:Fallback xmlns="" xmlns:mv="urn:schemas-microsoft-com:mac:vml" xmlns:c="http://schemas.openxmlformats.org/drawingml/2006/chart" xmlns:dgm="http://schemas.openxmlformats.org/drawingml/2006/diagram" xmlns:o="urn:schemas-microsoft-com:office:office" xmlns:v="urn:schemas-microsoft-com:vml" xmlns:pvml="urn:schemas-microsoft-com:office:powerpoint" xmlns:com="http://schemas.openxmlformats.org/drawingml/2006/compatibility" xmlns:p15="http://schemas.microsoft.com/office/powerpoint/2012/main" xmlns:ahyp="http://schemas.microsoft.com/office/drawing/2018/hyperlinkcolor">
       <p:transition spd="slow">
         <p:fade/>
       </p:transition>
@@ -19407,477 +19265,36 @@
           </a:p>
         </p:txBody>
       </p:sp>
-      <p:graphicFrame>
-        <p:nvGraphicFramePr>
-          <p:cNvPr id="3" name="Table 2">
+      <p:pic>
+        <p:nvPicPr>
+          <p:cNvPr id="8" name="Image 7">
             <a:extLst>
               <a:ext uri="{FF2B5EF4-FFF2-40B4-BE49-F238E27FC236}">
-                <a16:creationId xmlns:a16="http://schemas.microsoft.com/office/drawing/2014/main" id="{A0454EA4-34EA-7A9A-5CB2-DD3768FA294D}"/>
+                <a16:creationId xmlns:a16="http://schemas.microsoft.com/office/drawing/2014/main" id="{1B6E202C-F850-9FBB-F9B6-A5A12180677B}"/>
               </a:ext>
             </a:extLst>
           </p:cNvPr>
-          <p:cNvGraphicFramePr>
-            <a:graphicFrameLocks noGrp="1"/>
-          </p:cNvGraphicFramePr>
-          <p:nvPr>
-            <p:extLst>
-              <p:ext uri="{D42A27DB-BD31-4B8C-83A1-F6EECF244321}">
-                <p14:modId xmlns:p14="http://schemas.microsoft.com/office/powerpoint/2010/main" val="2487012446"/>
-              </p:ext>
-            </p:extLst>
-          </p:nvPr>
-        </p:nvGraphicFramePr>
-        <p:xfrm>
-          <a:off x="113188" y="1707423"/>
-          <a:ext cx="8622240" cy="3226338"/>
-        </p:xfrm>
-        <a:graphic>
-          <a:graphicData uri="http://schemas.openxmlformats.org/drawingml/2006/table">
-            <a:tbl>
-              <a:tblPr firstRow="1" bandRow="1">
-                <a:tableStyleId>{5C22544A-7EE6-4342-B048-85BDC9FD1C3A}</a:tableStyleId>
-              </a:tblPr>
-              <a:tblGrid>
-                <a:gridCol w="956660">
-                  <a:extLst>
-                    <a:ext uri="{9D8B030D-6E8A-4147-A177-3AD203B41FA5}">
-                      <a16:colId xmlns:a16="http://schemas.microsoft.com/office/drawing/2014/main" val="1600275397"/>
-                    </a:ext>
-                  </a:extLst>
-                </a:gridCol>
-                <a:gridCol w="6007608">
-                  <a:extLst>
-                    <a:ext uri="{9D8B030D-6E8A-4147-A177-3AD203B41FA5}">
-                      <a16:colId xmlns:a16="http://schemas.microsoft.com/office/drawing/2014/main" val="309591012"/>
-                    </a:ext>
-                  </a:extLst>
-                </a:gridCol>
-                <a:gridCol w="1657972">
-                  <a:extLst>
-                    <a:ext uri="{9D8B030D-6E8A-4147-A177-3AD203B41FA5}">
-                      <a16:colId xmlns:a16="http://schemas.microsoft.com/office/drawing/2014/main" val="1923418401"/>
-                    </a:ext>
-                  </a:extLst>
-                </a:gridCol>
-              </a:tblGrid>
-              <a:tr h="465139">
-                <a:tc>
-                  <a:txBody>
-                    <a:bodyPr/>
-                    <a:lstStyle/>
-                    <a:p>
-                      <a:r>
-                        <a:rPr lang="en-US" dirty="0"/>
-                        <a:t>Time Slot</a:t>
-                      </a:r>
-                    </a:p>
-                  </a:txBody>
-                  <a:tcPr/>
-                </a:tc>
-                <a:tc>
-                  <a:txBody>
-                    <a:bodyPr/>
-                    <a:lstStyle/>
-                    <a:p>
-                      <a:r>
-                        <a:rPr lang="en-US" dirty="0"/>
-                        <a:t>Topic</a:t>
-                      </a:r>
-                    </a:p>
-                  </a:txBody>
-                  <a:tcPr/>
-                </a:tc>
-                <a:tc>
-                  <a:txBody>
-                    <a:bodyPr/>
-                    <a:lstStyle/>
-                    <a:p>
-                      <a:r>
-                        <a:rPr lang="en-US" dirty="0"/>
-                        <a:t>Presenters</a:t>
-                      </a:r>
-                    </a:p>
-                  </a:txBody>
-                  <a:tcPr/>
-                </a:tc>
-                <a:extLst>
-                  <a:ext uri="{0D108BD9-81ED-4DB2-BD59-A6C34878D82A}">
-                    <a16:rowId xmlns:a16="http://schemas.microsoft.com/office/drawing/2014/main" val="2836528461"/>
-                  </a:ext>
-                </a:extLst>
-              </a:tr>
-              <a:tr h="273611">
-                <a:tc>
-                  <a:txBody>
-                    <a:bodyPr/>
-                    <a:lstStyle/>
-                    <a:p>
-                      <a:r>
-                        <a:rPr lang="en-US" dirty="0"/>
-                        <a:t>5</a:t>
-                      </a:r>
-                    </a:p>
-                  </a:txBody>
-                  <a:tcPr/>
-                </a:tc>
-                <a:tc>
-                  <a:txBody>
-                    <a:bodyPr/>
-                    <a:lstStyle/>
-                    <a:p>
-                      <a:r>
-                        <a:rPr lang="en-US" dirty="0"/>
-                        <a:t>Agenda Bashing &amp; Introduction</a:t>
-                      </a:r>
-                    </a:p>
-                  </a:txBody>
-                  <a:tcPr/>
-                </a:tc>
-                <a:tc>
-                  <a:txBody>
-                    <a:bodyPr/>
-                    <a:lstStyle/>
-                    <a:p>
-                      <a:r>
-                        <a:rPr lang="en-US" dirty="0"/>
-                        <a:t>Ads</a:t>
-                      </a:r>
-                    </a:p>
-                  </a:txBody>
-                  <a:tcPr/>
-                </a:tc>
-                <a:extLst>
-                  <a:ext uri="{0D108BD9-81ED-4DB2-BD59-A6C34878D82A}">
-                    <a16:rowId xmlns:a16="http://schemas.microsoft.com/office/drawing/2014/main" val="3125738235"/>
-                  </a:ext>
-                </a:extLst>
-              </a:tr>
-              <a:tr h="273611">
-                <a:tc>
-                  <a:txBody>
-                    <a:bodyPr/>
-                    <a:lstStyle/>
-                    <a:p>
-                      <a:r>
-                        <a:rPr lang="en-US" dirty="0"/>
-                        <a:t>20</a:t>
-                      </a:r>
-                    </a:p>
-                  </a:txBody>
-                  <a:tcPr/>
-                </a:tc>
-                <a:tc>
-                  <a:txBody>
-                    <a:bodyPr/>
-                    <a:lstStyle/>
-                    <a:p>
-                      <a:r>
-                        <a:rPr lang="en-US" dirty="0"/>
-                        <a:t>State of OPS Area</a:t>
-                      </a:r>
-                    </a:p>
-                  </a:txBody>
-                  <a:tcPr/>
-                </a:tc>
-                <a:tc>
-                  <a:txBody>
-                    <a:bodyPr/>
-                    <a:lstStyle/>
-                    <a:p>
-                      <a:r>
-                        <a:rPr lang="en-US" dirty="0"/>
-                        <a:t>TBC</a:t>
-                      </a:r>
-                    </a:p>
-                  </a:txBody>
-                  <a:tcPr/>
-                </a:tc>
-                <a:extLst>
-                  <a:ext uri="{0D108BD9-81ED-4DB2-BD59-A6C34878D82A}">
-                    <a16:rowId xmlns:a16="http://schemas.microsoft.com/office/drawing/2014/main" val="3448214922"/>
-                  </a:ext>
-                </a:extLst>
-              </a:tr>
-              <a:tr h="273611">
-                <a:tc>
-                  <a:txBody>
-                    <a:bodyPr/>
-                    <a:lstStyle/>
-                    <a:p>
-                      <a:r>
-                        <a:rPr lang="en-US" dirty="0"/>
-                        <a:t>15</a:t>
-                      </a:r>
-                    </a:p>
-                  </a:txBody>
-                  <a:tcPr/>
-                </a:tc>
-                <a:tc>
-                  <a:txBody>
-                    <a:bodyPr/>
-                    <a:lstStyle/>
-                    <a:p>
-                      <a:r>
-                        <a:rPr lang="en-US" dirty="0"/>
-                        <a:t>IP Address Geolocation</a:t>
-                      </a:r>
-                    </a:p>
-                  </a:txBody>
-                  <a:tcPr/>
-                </a:tc>
-                <a:tc>
-                  <a:txBody>
-                    <a:bodyPr/>
-                    <a:lstStyle/>
-                    <a:p>
-                      <a:r>
-                        <a:rPr lang="en-US" dirty="0"/>
-                        <a:t>Tommy</a:t>
-                      </a:r>
-                    </a:p>
-                  </a:txBody>
-                  <a:tcPr/>
-                </a:tc>
-                <a:extLst>
-                  <a:ext uri="{0D108BD9-81ED-4DB2-BD59-A6C34878D82A}">
-                    <a16:rowId xmlns:a16="http://schemas.microsoft.com/office/drawing/2014/main" val="622706864"/>
-                  </a:ext>
-                </a:extLst>
-              </a:tr>
-              <a:tr h="426855">
-                <a:tc>
-                  <a:txBody>
-                    <a:bodyPr/>
-                    <a:lstStyle/>
-                    <a:p>
-                      <a:r>
-                        <a:rPr lang="en-US" dirty="0"/>
-                        <a:t>20</a:t>
-                      </a:r>
-                    </a:p>
-                  </a:txBody>
-                  <a:tcPr/>
-                </a:tc>
-                <a:tc>
-                  <a:txBody>
-                    <a:bodyPr/>
-                    <a:lstStyle/>
-                    <a:p>
-                      <a:r>
-                        <a:rPr lang="en-US" dirty="0"/>
-                        <a:t>XXX over QUIC: Operational Motivations &amp; Challenges</a:t>
-                      </a:r>
-                    </a:p>
-                  </a:txBody>
-                  <a:tcPr/>
-                </a:tc>
-                <a:tc>
-                  <a:txBody>
-                    <a:bodyPr/>
-                    <a:lstStyle/>
-                    <a:p>
-                      <a:r>
-                        <a:rPr lang="en-US" dirty="0"/>
-                        <a:t>Per</a:t>
-                      </a:r>
-                    </a:p>
-                  </a:txBody>
-                  <a:tcPr/>
-                </a:tc>
-                <a:extLst>
-                  <a:ext uri="{0D108BD9-81ED-4DB2-BD59-A6C34878D82A}">
-                    <a16:rowId xmlns:a16="http://schemas.microsoft.com/office/drawing/2014/main" val="1421471092"/>
-                  </a:ext>
-                </a:extLst>
-              </a:tr>
-              <a:tr h="273611">
-                <a:tc>
-                  <a:txBody>
-                    <a:bodyPr/>
-                    <a:lstStyle/>
-                    <a:p>
-                      <a:r>
-                        <a:rPr lang="en-US" dirty="0"/>
-                        <a:t>15</a:t>
-                      </a:r>
-                    </a:p>
-                  </a:txBody>
-                  <a:tcPr/>
-                </a:tc>
-                <a:tc>
-                  <a:txBody>
-                    <a:bodyPr/>
-                    <a:lstStyle/>
-                    <a:p>
-                      <a:r>
-                        <a:rPr lang="en-US" dirty="0"/>
-                        <a:t>Proposals for ICMP Extensions</a:t>
-                      </a:r>
-                    </a:p>
-                  </a:txBody>
-                  <a:tcPr/>
-                </a:tc>
-                <a:tc>
-                  <a:txBody>
-                    <a:bodyPr/>
-                    <a:lstStyle/>
-                    <a:p>
-                      <a:r>
-                        <a:rPr lang="en-US" dirty="0"/>
-                        <a:t>Ron</a:t>
-                      </a:r>
-                    </a:p>
-                  </a:txBody>
-                  <a:tcPr/>
-                </a:tc>
-                <a:extLst>
-                  <a:ext uri="{0D108BD9-81ED-4DB2-BD59-A6C34878D82A}">
-                    <a16:rowId xmlns:a16="http://schemas.microsoft.com/office/drawing/2014/main" val="3371019738"/>
-                  </a:ext>
-                </a:extLst>
-              </a:tr>
-              <a:tr h="426855">
-                <a:tc>
-                  <a:txBody>
-                    <a:bodyPr/>
-                    <a:lstStyle/>
-                    <a:p>
-                      <a:r>
-                        <a:rPr lang="en-US" dirty="0"/>
-                        <a:t>15</a:t>
-                      </a:r>
-                    </a:p>
-                  </a:txBody>
-                  <a:tcPr/>
-                </a:tc>
-                <a:tc>
-                  <a:txBody>
-                    <a:bodyPr/>
-                    <a:lstStyle/>
-                    <a:p>
-                      <a:r>
-                        <a:rPr lang="en-US" dirty="0"/>
-                        <a:t>IRTF/IETF OPS Transfer: Status &amp; Exploring Collaboration Opportunities</a:t>
-                      </a:r>
-                    </a:p>
-                  </a:txBody>
-                  <a:tcPr/>
-                </a:tc>
-                <a:tc>
-                  <a:txBody>
-                    <a:bodyPr/>
-                    <a:lstStyle/>
-                    <a:p>
-                      <a:r>
-                        <a:rPr lang="en-US" dirty="0"/>
-                        <a:t>Thomas</a:t>
-                      </a:r>
-                    </a:p>
-                  </a:txBody>
-                  <a:tcPr/>
-                </a:tc>
-                <a:extLst>
-                  <a:ext uri="{0D108BD9-81ED-4DB2-BD59-A6C34878D82A}">
-                    <a16:rowId xmlns:a16="http://schemas.microsoft.com/office/drawing/2014/main" val="4113373083"/>
-                  </a:ext>
-                </a:extLst>
-              </a:tr>
-              <a:tr h="273611">
-                <a:tc>
-                  <a:txBody>
-                    <a:bodyPr/>
-                    <a:lstStyle/>
-                    <a:p>
-                      <a:r>
-                        <a:rPr lang="en-US" dirty="0"/>
-                        <a:t>15</a:t>
-                      </a:r>
-                    </a:p>
-                  </a:txBody>
-                  <a:tcPr/>
-                </a:tc>
-                <a:tc>
-                  <a:txBody>
-                    <a:bodyPr/>
-                    <a:lstStyle/>
-                    <a:p>
-                      <a:r>
-                        <a:rPr lang="en-US" dirty="0"/>
-                        <a:t>Implementation policy in OPS</a:t>
-                      </a:r>
-                    </a:p>
-                  </a:txBody>
-                  <a:tcPr/>
-                </a:tc>
-                <a:tc>
-                  <a:txBody>
-                    <a:bodyPr/>
-                    <a:lstStyle/>
-                    <a:p>
-                      <a:r>
-                        <a:rPr lang="en-US" dirty="0"/>
-                        <a:t>Job</a:t>
-                      </a:r>
-                    </a:p>
-                  </a:txBody>
-                  <a:tcPr/>
-                </a:tc>
-                <a:extLst>
-                  <a:ext uri="{0D108BD9-81ED-4DB2-BD59-A6C34878D82A}">
-                    <a16:rowId xmlns:a16="http://schemas.microsoft.com/office/drawing/2014/main" val="3555243978"/>
-                  </a:ext>
-                </a:extLst>
-              </a:tr>
-              <a:tr h="330468">
-                <a:tc>
-                  <a:txBody>
-                    <a:bodyPr/>
-                    <a:lstStyle/>
-                    <a:p>
-                      <a:r>
-                        <a:rPr lang="en-US" dirty="0"/>
-                        <a:t>15</a:t>
-                      </a:r>
-                    </a:p>
-                  </a:txBody>
-                  <a:tcPr/>
-                </a:tc>
-                <a:tc>
-                  <a:txBody>
-                    <a:bodyPr/>
-                    <a:lstStyle/>
-                    <a:p>
-                      <a:r>
-                        <a:rPr lang="en-US" dirty="0"/>
-                        <a:t>Raven: Opensource BGP Routing Validation</a:t>
-                      </a:r>
-                    </a:p>
-                  </a:txBody>
-                  <a:tcPr/>
-                </a:tc>
-                <a:tc>
-                  <a:txBody>
-                    <a:bodyPr/>
-                    <a:lstStyle/>
-                    <a:p>
-                      <a:r>
-                        <a:rPr lang="en-US" dirty="0"/>
-                        <a:t>Ritesh</a:t>
-                      </a:r>
-                    </a:p>
-                  </a:txBody>
-                  <a:tcPr/>
-                </a:tc>
-                <a:extLst>
-                  <a:ext uri="{0D108BD9-81ED-4DB2-BD59-A6C34878D82A}">
-                    <a16:rowId xmlns:a16="http://schemas.microsoft.com/office/drawing/2014/main" val="1104942055"/>
-                  </a:ext>
-                </a:extLst>
-              </a:tr>
-            </a:tbl>
-          </a:graphicData>
-        </a:graphic>
-      </p:graphicFrame>
+          <p:cNvPicPr>
+            <a:picLocks noChangeAspect="1"/>
+          </p:cNvPicPr>
+          <p:nvPr/>
+        </p:nvPicPr>
+        <p:blipFill>
+          <a:blip r:embed="rId2"/>
+          <a:stretch>
+            <a:fillRect/>
+          </a:stretch>
+        </p:blipFill>
+        <p:spPr>
+          <a:xfrm>
+            <a:off x="1404518" y="1737686"/>
+            <a:ext cx="6884434" cy="3405814"/>
+          </a:xfrm>
+          <a:prstGeom prst="rect">
+            <a:avLst/>
+          </a:prstGeom>
+        </p:spPr>
+      </p:pic>
     </p:spTree>
     <p:extLst>
       <p:ext uri="{BB962C8B-B14F-4D97-AF65-F5344CB8AC3E}">
